--- a/system-design-101/vi/lessons/sd-13-019/slides/sd-13-019.pptx
+++ b/system-design-101/vi/lessons/sd-13-019/slides/sd-13-019.pptx
@@ -1798,7 +1798,7 @@
         <p:spPr>
           <a:xfrm>
             <a:off x="914400" y="1333500"/>
-            <a:ext cx="15716250" cy="2857500"/>
+            <a:ext cx="16459200" cy="3429000"/>
           </a:xfrm>
           <a:prstGeom prst="rect">
             <a:avLst/>
@@ -1807,17 +1807,17 @@
           <a:ln/>
         </p:spPr>
         <p:txBody>
-          <a:bodyPr wrap="square" lIns="0" tIns="57150" rIns="0" bIns="-57150" rtlCol="0" anchor="t"/>
+          <a:bodyPr wrap="square" lIns="0" tIns="61722" rIns="0" bIns="-61722" rtlCol="0" anchor="t"/>
           <a:lstStyle/>
           <a:p>
             <a:pPr algn="l" indent="0" marL="0">
               <a:lnSpc>
-                <a:spcPts val="8100"/>
+                <a:spcPts val="8748"/>
               </a:lnSpc>
               <a:buNone/>
             </a:pPr>
             <a:r>
-              <a:rPr lang="en-US" sz="7500" dirty="0" spc="1" kern="0">
+              <a:rPr lang="en-US" sz="8100" dirty="0" spc="2" kern="0">
                 <a:solidFill>
                   <a:srgbClr val="F3EEE3"/>
                 </a:solidFill>
@@ -1828,7 +1828,7 @@
               <a:t>Bốn</a:t>
             </a:r>
             <a:r>
-              <a:rPr lang="en-US" sz="7500" dirty="0" spc="0" kern="0">
+              <a:rPr lang="en-US" sz="8100" dirty="0" spc="1" kern="0">
                 <a:solidFill>
                   <a:srgbClr val="F3EEE3"/>
                 </a:solidFill>
@@ -1836,10 +1836,10 @@
                 <a:ea typeface="Bricolage Grotesque ExtraBold" pitchFamily="34" charset="-122"/>
                 <a:cs typeface="Bricolage Grotesque ExtraBold" pitchFamily="34" charset="-120"/>
               </a:rPr>
-              <a:t> nút thắt</a:t>
-            </a:r>
-            <a:r>
-              <a:rPr lang="en-US" sz="7500" dirty="0" spc="-49" kern="0">
+              <a:t> nút</a:t>
+            </a:r>
+            <a:r>
+              <a:rPr lang="en-US" sz="8100" dirty="0" spc="3" kern="0">
                 <a:solidFill>
                   <a:srgbClr val="F3EEE3"/>
                 </a:solidFill>
@@ -1847,10 +1847,10 @@
                 <a:ea typeface="Bricolage Grotesque ExtraBold" pitchFamily="34" charset="-122"/>
                 <a:cs typeface="Bricolage Grotesque ExtraBold" pitchFamily="34" charset="-120"/>
               </a:rPr>
-              <a:t> giữa</a:t>
-            </a:r>
-            <a:r>
-              <a:rPr lang="en-US" sz="7500" dirty="0" spc="3" kern="0">
+              <a:t> thắt</a:t>
+            </a:r>
+            <a:r>
+              <a:rPr lang="en-US" sz="8100" dirty="0" spc="-57" kern="0">
                 <a:solidFill>
                   <a:srgbClr val="F3EEE3"/>
                 </a:solidFill>
@@ -1858,10 +1858,10 @@
                 <a:ea typeface="Bricolage Grotesque ExtraBold" pitchFamily="34" charset="-122"/>
                 <a:cs typeface="Bricolage Grotesque ExtraBold" pitchFamily="34" charset="-120"/>
               </a:rPr>
-              <a:t> các</a:t>
-            </a:r>
-            <a:r>
-              <a:rPr lang="en-US" sz="7500" dirty="0" spc="1" kern="0">
+              <a:t> giữa</a:t>
+            </a:r>
+            <a:r>
+              <a:rPr lang="en-US" sz="8100" dirty="0" spc="2" kern="0">
                 <a:solidFill>
                   <a:srgbClr val="F3EEE3"/>
                 </a:solidFill>
@@ -1869,10 +1869,10 @@
                 <a:ea typeface="Bricolage Grotesque ExtraBold" pitchFamily="34" charset="-122"/>
                 <a:cs typeface="Bricolage Grotesque ExtraBold" pitchFamily="34" charset="-120"/>
               </a:rPr>
-              <a:t> nhóm</a:t>
-            </a:r>
-            <a:r>
-              <a:rPr lang="en-US" sz="7500" dirty="0" spc="0" kern="0">
+              <a:t> các nhóm</a:t>
+            </a:r>
+            <a:r>
+              <a:rPr lang="en-US" sz="8100" dirty="0" spc="-4" kern="0">
                 <a:solidFill>
                   <a:srgbClr val="F3EEE3"/>
                 </a:solidFill>
@@ -1883,7 +1883,7 @@
               <a:t> khi</a:t>
             </a:r>
             <a:r>
-              <a:rPr lang="en-US" sz="7500" dirty="0" spc="-49" kern="0">
+              <a:rPr lang="en-US" sz="8100" dirty="0" spc="-52" kern="0">
                 <a:solidFill>
                   <a:srgbClr val="F3EEE3"/>
                 </a:solidFill>
@@ -1894,7 +1894,7 @@
               <a:t> đưa</a:t>
             </a:r>
             <a:r>
-              <a:rPr lang="en-US" sz="7500" dirty="0" spc="4" kern="0">
+              <a:rPr lang="en-US" sz="8100" dirty="0" spc="2" kern="0">
                 <a:solidFill>
                   <a:srgbClr val="F3EEE3"/>
                 </a:solidFill>
@@ -1905,7 +1905,7 @@
               <a:t> phần</a:t>
             </a:r>
             <a:r>
-              <a:rPr lang="en-US" sz="7500" dirty="0" spc="3" kern="0">
+              <a:rPr lang="en-US" sz="8100" dirty="0" spc="5" kern="0">
                 <a:solidFill>
                   <a:srgbClr val="F3EEE3"/>
                 </a:solidFill>
@@ -1916,7 +1916,7 @@
               <a:t> mềm</a:t>
             </a:r>
             <a:r>
-              <a:rPr lang="en-US" sz="7500" dirty="0" spc="6" kern="0">
+              <a:rPr lang="en-US" sz="8100" dirty="0" spc="2" kern="0">
                 <a:solidFill>
                   <a:srgbClr val="F3EEE3"/>
                 </a:solidFill>
@@ -1924,20 +1924,9 @@
                 <a:ea typeface="Bricolage Grotesque ExtraBold" pitchFamily="34" charset="-122"/>
                 <a:cs typeface="Bricolage Grotesque ExtraBold" pitchFamily="34" charset="-120"/>
               </a:rPr>
-              <a:t> lên</a:t>
-            </a:r>
-            <a:r>
-              <a:rPr lang="en-US" sz="7500" dirty="0" spc="3" kern="0">
-                <a:solidFill>
-                  <a:srgbClr val="F3EEE3"/>
-                </a:solidFill>
-                <a:latin typeface="Bricolage Grotesque ExtraBold" pitchFamily="34" charset="0"/>
-                <a:ea typeface="Bricolage Grotesque ExtraBold" pitchFamily="34" charset="-122"/>
-                <a:cs typeface="Bricolage Grotesque ExtraBold" pitchFamily="34" charset="-120"/>
-              </a:rPr>
-              <a:t> chạy</a:t>
-            </a:r>
-            <a:endParaRPr lang="en-US" sz="7500" dirty="0"/>
+              <a:t> lên chạy</a:t>
+            </a:r>
+            <a:endParaRPr lang="en-US" sz="8100" dirty="0"/>
           </a:p>
         </p:txBody>
       </p:sp>
@@ -1949,7 +1938,7 @@
         </p:nvSpPr>
         <p:spPr>
           <a:xfrm>
-            <a:off x="914400" y="4572000"/>
+            <a:off x="914400" y="4953000"/>
             <a:ext cx="16459200" cy="533400"/>
           </a:xfrm>
           <a:prstGeom prst="rect">
@@ -2677,101 +2666,7 @@
       </p:sp>
       <p:sp>
         <p:nvSpPr>
-          <p:cNvPr id="17" name="Text 15"/>
-          <p:cNvSpPr/>
-          <p:nvPr/>
-        </p:nvSpPr>
-        <p:spPr>
-          <a:xfrm>
-            <a:off x="914400" y="9525000"/>
-            <a:ext cx="8572500" cy="342900"/>
-          </a:xfrm>
-          <a:prstGeom prst="rect">
-            <a:avLst/>
-          </a:prstGeom>
-          <a:noFill/>
-          <a:ln/>
-        </p:spPr>
-        <p:txBody>
-          <a:bodyPr wrap="square" lIns="0" tIns="0" rIns="0" bIns="0" rtlCol="0" anchor="t"/>
-          <a:lstStyle/>
-          <a:p>
-            <a:pPr algn="l" indent="0" marL="0">
-              <a:buNone/>
-            </a:pPr>
-            <a:r>
-              <a:rPr lang="en-US" sz="1800" dirty="0" spc="-13" kern="0">
-                <a:solidFill>
-                  <a:srgbClr val="9AA0B5"/>
-                </a:solidFill>
-                <a:latin typeface="Be Vietnam Pro" pitchFamily="34" charset="0"/>
-                <a:ea typeface="Be Vietnam Pro" pitchFamily="34" charset="-122"/>
-                <a:cs typeface="Be Vietnam Pro" pitchFamily="34" charset="-120"/>
-              </a:rPr>
-              <a:t>System</a:t>
-            </a:r>
-            <a:r>
-              <a:rPr lang="en-US" sz="1800" dirty="0" spc="-1" kern="0">
-                <a:solidFill>
-                  <a:srgbClr val="9AA0B5"/>
-                </a:solidFill>
-                <a:latin typeface="Be Vietnam Pro" pitchFamily="34" charset="0"/>
-                <a:ea typeface="Be Vietnam Pro" pitchFamily="34" charset="-122"/>
-                <a:cs typeface="Be Vietnam Pro" pitchFamily="34" charset="-120"/>
-              </a:rPr>
-              <a:t> Design</a:t>
-            </a:r>
-            <a:r>
-              <a:rPr lang="en-US" sz="1800" dirty="0" spc="4" kern="0">
-                <a:solidFill>
-                  <a:srgbClr val="9AA0B5"/>
-                </a:solidFill>
-                <a:latin typeface="Be Vietnam Pro" pitchFamily="34" charset="0"/>
-                <a:ea typeface="Be Vietnam Pro" pitchFamily="34" charset="-122"/>
-                <a:cs typeface="Be Vietnam Pro" pitchFamily="34" charset="-120"/>
-              </a:rPr>
-              <a:t> 101</a:t>
-            </a:r>
-            <a:r>
-              <a:rPr lang="en-US" sz="1800" dirty="0" spc="-2" kern="0">
-                <a:solidFill>
-                  <a:srgbClr val="9AA0B5"/>
-                </a:solidFill>
-                <a:latin typeface="Be Vietnam Pro" pitchFamily="34" charset="0"/>
-                <a:ea typeface="Be Vietnam Pro" pitchFamily="34" charset="-122"/>
-                <a:cs typeface="Be Vietnam Pro" pitchFamily="34" charset="-120"/>
-              </a:rPr>
-              <a:t> ·</a:t>
-            </a:r>
-            <a:r>
-              <a:rPr lang="en-US" sz="1800" dirty="0" spc="1" kern="0">
-                <a:solidFill>
-                  <a:srgbClr val="9AA0B5"/>
-                </a:solidFill>
-                <a:latin typeface="Be Vietnam Pro" pitchFamily="34" charset="0"/>
-                <a:ea typeface="Be Vietnam Pro" pitchFamily="34" charset="-122"/>
-                <a:cs typeface="Be Vietnam Pro" pitchFamily="34" charset="-120"/>
-              </a:rPr>
-              <a:t> Bài</a:t>
-            </a:r>
-            <a:r>
-              <a:rPr lang="en-US" sz="1800" dirty="0" spc="2" kern="0">
-                <a:solidFill>
-                  <a:srgbClr val="9AA0B5"/>
-                </a:solidFill>
-                <a:latin typeface="Be Vietnam Pro" pitchFamily="34" charset="0"/>
-                <a:ea typeface="Be Vietnam Pro" pitchFamily="34" charset="-122"/>
-                <a:cs typeface="Be Vietnam Pro" pitchFamily="34" charset="-120"/>
-              </a:rPr>
-              <a:t> 19</a:t>
-            </a:r>
-            <a:endParaRPr lang="en-US" sz="1800" dirty="0"/>
-          </a:p>
-        </p:txBody>
-      </p:sp>
-      <p:sp>
-        <p:nvSpPr>
-          <p:cNvPr id="18" name="Shape 16"/>
+          <p:cNvPr id="17" name="Shape 15"/>
           <p:cNvSpPr/>
           <p:nvPr/>
         </p:nvSpPr>
@@ -2795,7 +2690,7 @@
       </p:sp>
       <p:pic>
         <p:nvPicPr>
-          <p:cNvPr id="19" name="Moda image moda-export-watermark-62bf55a5-fcaf-4a0b-adc9-34e248867bc3" descr="">    </p:cNvPr>
+          <p:cNvPr id="18" name="Moda image moda-export-watermark-62bf55a5-fcaf-4a0b-adc9-34e248867bc3" descr="">    </p:cNvPr>
           <p:cNvPicPr>
             <a:picLocks noChangeAspect="1"/>
           </p:cNvPicPr>

--- a/system-design-101/vi/lessons/sd-13-019/slides/sd-13-019.pptx
+++ b/system-design-101/vi/lessons/sd-13-019/slides/sd-13-019.pptx
@@ -4221,7 +4221,7 @@
               <a:buNone/>
             </a:pPr>
             <a:r>
-              <a:rPr lang="en-US" sz="6600" dirty="0" spc="-32" kern="0">
+              <a:rPr lang="en-US" sz="6900" dirty="0" spc="-32" kern="0">
                 <a:solidFill>
                   <a:srgbClr val="14161C"/>
                 </a:solidFill>
@@ -4232,7 +4232,7 @@
               <a:t>Thời</a:t>
             </a:r>
             <a:r>
-              <a:rPr lang="en-US" sz="6600" dirty="0" spc="-2" kern="0">
+              <a:rPr lang="en-US" sz="6900" dirty="0" spc="0" kern="0">
                 <a:solidFill>
                   <a:srgbClr val="14161C"/>
                 </a:solidFill>
@@ -4243,7 +4243,7 @@
               <a:t> gian</a:t>
             </a:r>
             <a:r>
-              <a:rPr lang="en-US" sz="6600" dirty="0" spc="1" kern="0">
+              <a:rPr lang="en-US" sz="6900" dirty="0" spc="-1" kern="0">
                 <a:solidFill>
                   <a:srgbClr val="14161C"/>
                 </a:solidFill>
@@ -4254,7 +4254,7 @@
               <a:t> mất</a:t>
             </a:r>
             <a:r>
-              <a:rPr lang="en-US" sz="6600" dirty="0" spc="2" kern="0">
+              <a:rPr lang="en-US" sz="6900" dirty="0" spc="1" kern="0">
                 <a:solidFill>
                   <a:srgbClr val="14161C"/>
                 </a:solidFill>
@@ -4265,7 +4265,7 @@
               <a:t> ở</a:t>
             </a:r>
             <a:r>
-              <a:rPr lang="en-US" sz="6600" dirty="0" spc="0" kern="0">
+              <a:rPr lang="en-US" sz="6900" dirty="0" spc="-1" kern="0">
                 <a:solidFill>
                   <a:srgbClr val="14161C"/>
                 </a:solidFill>
@@ -4276,7 +4276,7 @@
               <a:t> chỗ</a:t>
             </a:r>
             <a:r>
-              <a:rPr lang="en-US" sz="6600" dirty="0" spc="-1" kern="0">
+              <a:rPr lang="en-US" sz="6900" dirty="0" spc="3" kern="0">
                 <a:solidFill>
                   <a:srgbClr val="14161C"/>
                 </a:solidFill>
@@ -4284,9 +4284,20 @@
                 <a:ea typeface="Bricolage Grotesque ExtraBold" pitchFamily="34" charset="-122"/>
                 <a:cs typeface="Bricolage Grotesque ExtraBold" pitchFamily="34" charset="-120"/>
               </a:rPr>
-              <a:t> chuyển giao</a:t>
-            </a:r>
-            <a:endParaRPr lang="en-US" sz="6600" dirty="0"/>
+              <a:t> chuyển</a:t>
+            </a:r>
+            <a:r>
+              <a:rPr lang="en-US" sz="6900" dirty="0" spc="0" kern="0">
+                <a:solidFill>
+                  <a:srgbClr val="14161C"/>
+                </a:solidFill>
+                <a:latin typeface="Bricolage Grotesque ExtraBold" pitchFamily="34" charset="0"/>
+                <a:ea typeface="Bricolage Grotesque ExtraBold" pitchFamily="34" charset="-122"/>
+                <a:cs typeface="Bricolage Grotesque ExtraBold" pitchFamily="34" charset="-120"/>
+              </a:rPr>
+              <a:t> giao</a:t>
+            </a:r>
+            <a:endParaRPr lang="en-US" sz="6900" dirty="0"/>
           </a:p>
         </p:txBody>
       </p:sp>
@@ -8467,7 +8478,7 @@
               <a:buNone/>
             </a:pPr>
             <a:r>
-              <a:rPr lang="en-US" sz="6600" dirty="0" spc="7" kern="0">
+              <a:rPr lang="en-US" sz="6900" dirty="0" spc="11" kern="0">
                 <a:solidFill>
                   <a:srgbClr val="F3EEE3"/>
                 </a:solidFill>
@@ -8478,7 +8489,7 @@
               <a:t>Hiểu</a:t>
             </a:r>
             <a:r>
-              <a:rPr lang="en-US" sz="6600" dirty="0" spc="-1" kern="0">
+              <a:rPr lang="en-US" sz="6900" dirty="0" spc="2" kern="0">
                 <a:solidFill>
                   <a:srgbClr val="F3EEE3"/>
                 </a:solidFill>
@@ -8489,7 +8500,7 @@
               <a:t> biết</a:t>
             </a:r>
             <a:r>
-              <a:rPr lang="en-US" sz="6600" dirty="0" spc="1" kern="0">
+              <a:rPr lang="en-US" sz="6900" dirty="0" spc="0" kern="0">
                 <a:solidFill>
                   <a:srgbClr val="F3EEE3"/>
                 </a:solidFill>
@@ -8500,7 +8511,7 @@
               <a:t> dồn</a:t>
             </a:r>
             <a:r>
-              <a:rPr lang="en-US" sz="6600" dirty="0" spc="-52" kern="0">
+              <a:rPr lang="en-US" sz="6900" dirty="0" spc="-57" kern="0">
                 <a:solidFill>
                   <a:srgbClr val="F3EEE3"/>
                 </a:solidFill>
@@ -8508,10 +8519,10 @@
                 <a:ea typeface="Bricolage Grotesque ExtraBold" pitchFamily="34" charset="-122"/>
                 <a:cs typeface="Bricolage Grotesque ExtraBold" pitchFamily="34" charset="-120"/>
               </a:rPr>
-              <a:t> vào</a:t>
-            </a:r>
-            <a:r>
-              <a:rPr lang="en-US" sz="6600" dirty="0" spc="-55" kern="0">
+              <a:t> vào vài</a:t>
+            </a:r>
+            <a:r>
+              <a:rPr lang="en-US" sz="6900" dirty="0" spc="-65" kern="0">
                 <a:solidFill>
                   <a:srgbClr val="F3EEE3"/>
                 </a:solidFill>
@@ -8519,20 +8530,9 @@
                 <a:ea typeface="Bricolage Grotesque ExtraBold" pitchFamily="34" charset="-122"/>
                 <a:cs typeface="Bricolage Grotesque ExtraBold" pitchFamily="34" charset="-120"/>
               </a:rPr>
-              <a:t> vài</a:t>
-            </a:r>
-            <a:r>
-              <a:rPr lang="en-US" sz="6600" dirty="0" spc="-64" kern="0">
-                <a:solidFill>
-                  <a:srgbClr val="F3EEE3"/>
-                </a:solidFill>
-                <a:latin typeface="Bricolage Grotesque ExtraBold" pitchFamily="34" charset="0"/>
-                <a:ea typeface="Bricolage Grotesque ExtraBold" pitchFamily="34" charset="-122"/>
-                <a:cs typeface="Bricolage Grotesque ExtraBold" pitchFamily="34" charset="-120"/>
-              </a:rPr>
               <a:t> người</a:t>
             </a:r>
-            <a:endParaRPr lang="en-US" sz="6600" dirty="0"/>
+            <a:endParaRPr lang="en-US" sz="6900" dirty="0"/>
           </a:p>
         </p:txBody>
       </p:sp>
@@ -10857,7 +10857,7 @@
         <p:spPr>
           <a:xfrm>
             <a:off x="914400" y="1238250"/>
-            <a:ext cx="16459200" cy="952500"/>
+            <a:ext cx="16459200" cy="1143000"/>
           </a:xfrm>
           <a:prstGeom prst="rect">
             <a:avLst/>
@@ -10873,7 +10873,7 @@
               <a:buNone/>
             </a:pPr>
             <a:r>
-              <a:rPr lang="en-US" sz="4200" dirty="0" spc="0" kern="0">
+              <a:rPr lang="en-US" sz="6900" dirty="0" spc="1" kern="0">
                 <a:solidFill>
                   <a:srgbClr val="F3EEE3"/>
                 </a:solidFill>
@@ -10884,7 +10884,7 @@
               <a:t>Hết</a:t>
             </a:r>
             <a:r>
-              <a:rPr lang="en-US" sz="4200" dirty="0" spc="-4" kern="0">
+              <a:rPr lang="en-US" sz="6900" dirty="0" spc="-9" kern="0">
                 <a:solidFill>
                   <a:srgbClr val="F3EEE3"/>
                 </a:solidFill>
@@ -10895,7 +10895,7 @@
               <a:t> ngân</a:t>
             </a:r>
             <a:r>
-              <a:rPr lang="en-US" sz="4200" dirty="0" spc="1" kern="0">
+              <a:rPr lang="en-US" sz="6900" dirty="0" spc="0" kern="0">
                 <a:solidFill>
                   <a:srgbClr val="F3EEE3"/>
                 </a:solidFill>
@@ -10906,7 +10906,7 @@
               <a:t> sách</a:t>
             </a:r>
             <a:r>
-              <a:rPr lang="en-US" sz="4200" dirty="0" spc="-5" kern="0">
+              <a:rPr lang="en-US" sz="6900" dirty="0" spc="-3" kern="0">
                 <a:solidFill>
                   <a:srgbClr val="F3EEE3"/>
                 </a:solidFill>
@@ -10917,7 +10917,7 @@
               <a:t> lỗi,</a:t>
             </a:r>
             <a:r>
-              <a:rPr lang="en-US" sz="4200" dirty="0" spc="0" kern="0">
+              <a:rPr lang="en-US" sz="6900" dirty="0" spc="-1" kern="0">
                 <a:solidFill>
                   <a:srgbClr val="F3EEE3"/>
                 </a:solidFill>
@@ -10928,7 +10928,7 @@
               <a:t> còn</a:t>
             </a:r>
             <a:r>
-              <a:rPr lang="en-US" sz="4200" dirty="0" spc="-3" kern="0">
+              <a:rPr lang="en-US" sz="6900" dirty="0" spc="-6" kern="0">
                 <a:solidFill>
                   <a:srgbClr val="F3EEE3"/>
                 </a:solidFill>
@@ -10939,7 +10939,7 @@
               <a:t> ba</a:t>
             </a:r>
             <a:r>
-              <a:rPr lang="en-US" sz="4200" dirty="0" spc="-2" kern="0">
+              <a:rPr lang="en-US" sz="6900" dirty="0" spc="2" kern="0">
                 <a:solidFill>
                   <a:srgbClr val="F3EEE3"/>
                 </a:solidFill>
@@ -10947,64 +10947,9 @@
                 <a:ea typeface="Bricolage Grotesque ExtraBold" pitchFamily="34" charset="-122"/>
                 <a:cs typeface="Bricolage Grotesque ExtraBold" pitchFamily="34" charset="-120"/>
               </a:rPr>
-              <a:t> tính</a:t>
-            </a:r>
-            <a:r>
-              <a:rPr lang="en-US" sz="4200" dirty="0" spc="3" kern="0">
-                <a:solidFill>
-                  <a:srgbClr val="F3EEE3"/>
-                </a:solidFill>
-                <a:latin typeface="Bricolage Grotesque ExtraBold" pitchFamily="34" charset="0"/>
-                <a:ea typeface="Bricolage Grotesque ExtraBold" pitchFamily="34" charset="-122"/>
-                <a:cs typeface="Bricolage Grotesque ExtraBold" pitchFamily="34" charset="-120"/>
-              </a:rPr>
-              <a:t> năng</a:t>
-            </a:r>
-            <a:r>
-              <a:rPr lang="en-US" sz="4200" dirty="0" spc="2" kern="0">
-                <a:solidFill>
-                  <a:srgbClr val="F3EEE3"/>
-                </a:solidFill>
-                <a:latin typeface="Bricolage Grotesque ExtraBold" pitchFamily="34" charset="0"/>
-                <a:ea typeface="Bricolage Grotesque ExtraBold" pitchFamily="34" charset="-122"/>
-                <a:cs typeface="Bricolage Grotesque ExtraBold" pitchFamily="34" charset="-120"/>
-              </a:rPr>
-              <a:t> phải</a:t>
-            </a:r>
-            <a:r>
-              <a:rPr lang="en-US" sz="4200" dirty="0" spc="-15" kern="0">
-                <a:solidFill>
-                  <a:srgbClr val="F3EEE3"/>
-                </a:solidFill>
-                <a:latin typeface="Bricolage Grotesque ExtraBold" pitchFamily="34" charset="0"/>
-                <a:ea typeface="Bricolage Grotesque ExtraBold" pitchFamily="34" charset="-122"/>
-                <a:cs typeface="Bricolage Grotesque ExtraBold" pitchFamily="34" charset="-120"/>
-              </a:rPr>
-              <a:t> ra.</a:t>
-            </a:r>
-            <a:r>
-              <a:rPr lang="en-US" sz="4200" dirty="0" spc="2" kern="0">
-                <a:solidFill>
-                  <a:srgbClr val="F3EEE3"/>
-                </a:solidFill>
-                <a:latin typeface="Bricolage Grotesque ExtraBold" pitchFamily="34" charset="0"/>
-                <a:ea typeface="Bricolage Grotesque ExtraBold" pitchFamily="34" charset="-122"/>
-                <a:cs typeface="Bricolage Grotesque ExtraBold" pitchFamily="34" charset="-120"/>
-              </a:rPr>
-              <a:t> Làm</a:t>
-            </a:r>
-            <a:r>
-              <a:rPr lang="en-US" sz="4200" dirty="0" spc="-11" kern="0">
-                <a:solidFill>
-                  <a:srgbClr val="F3EEE3"/>
-                </a:solidFill>
-                <a:latin typeface="Bricolage Grotesque ExtraBold" pitchFamily="34" charset="0"/>
-                <a:ea typeface="Bricolage Grotesque ExtraBold" pitchFamily="34" charset="-122"/>
-                <a:cs typeface="Bricolage Grotesque ExtraBold" pitchFamily="34" charset="-120"/>
-              </a:rPr>
-              <a:t> gì?</a:t>
-            </a:r>
-            <a:endParaRPr lang="en-US" sz="4200" dirty="0"/>
+              <a:t> tính năng</a:t>
+            </a:r>
+            <a:endParaRPr lang="en-US" sz="6900" dirty="0"/>
           </a:p>
         </p:txBody>
       </p:sp>

--- a/system-design-101/vi/lessons/sd-13-019/slides/sd-13-019.pptx
+++ b/system-design-101/vi/lessons/sd-13-019/slides/sd-13-019.pptx
@@ -9970,7 +9970,7 @@
               <a:buNone/>
             </a:pPr>
             <a:r>
-              <a:rPr lang="en-US" sz="2850" dirty="0" spc="-144" kern="0">
+              <a:rPr lang="en-US" sz="2850" dirty="0" spc="-5" kern="0">
                 <a:solidFill>
                   <a:srgbClr val="14161C"/>
                 </a:solidFill>
@@ -9978,10 +9978,10 @@
                 <a:ea typeface="Be Vietnam Pro SemiBold" pitchFamily="34" charset="-122"/>
                 <a:cs typeface="Be Vietnam Pro SemiBold" pitchFamily="34" charset="-120"/>
               </a:rPr>
-              <a:t>Tổ</a:t>
-            </a:r>
-            <a:r>
-              <a:rPr lang="en-US" sz="2850" dirty="0" spc="13" kern="0">
+              <a:t>Nhỏ</a:t>
+            </a:r>
+            <a:r>
+              <a:rPr lang="en-US" sz="2850" dirty="0" spc="1" kern="0">
                 <a:solidFill>
                   <a:srgbClr val="14161C"/>
                 </a:solidFill>
@@ -9989,10 +9989,10 @@
                 <a:ea typeface="Be Vietnam Pro SemiBold" pitchFamily="34" charset="-122"/>
                 <a:cs typeface="Be Vietnam Pro SemiBold" pitchFamily="34" charset="-120"/>
               </a:rPr>
-              <a:t> chức</a:t>
-            </a:r>
-            <a:r>
-              <a:rPr lang="en-US" sz="2850" dirty="0" spc="-4" kern="0">
+              <a:t> thì</a:t>
+            </a:r>
+            <a:r>
+              <a:rPr lang="en-US" sz="2850" dirty="0" spc="11" kern="0">
                 <a:solidFill>
                   <a:srgbClr val="14161C"/>
                 </a:solidFill>
@@ -10000,10 +10000,10 @@
                 <a:ea typeface="Be Vietnam Pro SemiBold" pitchFamily="34" charset="-122"/>
                 <a:cs typeface="Be Vietnam Pro SemiBold" pitchFamily="34" charset="-120"/>
               </a:rPr>
-              <a:t> nhỏ</a:t>
-            </a:r>
-            <a:r>
-              <a:rPr lang="en-US" sz="2850" dirty="0" spc="11" kern="0">
+              <a:t> chưa</a:t>
+            </a:r>
+            <a:r>
+              <a:rPr lang="en-US" sz="2850" dirty="0" spc="3" kern="0">
                 <a:solidFill>
                   <a:srgbClr val="14161C"/>
                 </a:solidFill>
@@ -10011,10 +10011,10 @@
                 <a:ea typeface="Be Vietnam Pro SemiBold" pitchFamily="34" charset="-122"/>
                 <a:cs typeface="Be Vietnam Pro SemiBold" pitchFamily="34" charset="-120"/>
               </a:rPr>
-              <a:t> chưa</a:t>
-            </a:r>
-            <a:r>
-              <a:rPr lang="en-US" sz="2850" dirty="0" spc="3" kern="0">
+              <a:t> chắc</a:t>
+            </a:r>
+            <a:r>
+              <a:rPr lang="en-US" sz="2850" dirty="0" spc="1" kern="0">
                 <a:solidFill>
                   <a:srgbClr val="14161C"/>
                 </a:solidFill>
@@ -10022,10 +10022,10 @@
                 <a:ea typeface="Be Vietnam Pro SemiBold" pitchFamily="34" charset="-122"/>
                 <a:cs typeface="Be Vietnam Pro SemiBold" pitchFamily="34" charset="-120"/>
               </a:rPr>
-              <a:t> chắc</a:t>
-            </a:r>
-            <a:r>
-              <a:rPr lang="en-US" sz="2850" dirty="0" spc="0" kern="0">
+              <a:t> cần</a:t>
+            </a:r>
+            <a:r>
+              <a:rPr lang="en-US" sz="2850" dirty="0" spc="-6" kern="0">
                 <a:solidFill>
                   <a:srgbClr val="14161C"/>
                 </a:solidFill>
@@ -10033,10 +10033,10 @@
                 <a:ea typeface="Be Vietnam Pro SemiBold" pitchFamily="34" charset="-122"/>
                 <a:cs typeface="Be Vietnam Pro SemiBold" pitchFamily="34" charset="-120"/>
               </a:rPr>
-              <a:t> cần</a:t>
-            </a:r>
-            <a:r>
-              <a:rPr lang="en-US" sz="2850" dirty="0" spc="-6" kern="0">
+              <a:t> nhóm</a:t>
+            </a:r>
+            <a:r>
+              <a:rPr lang="en-US" sz="2850" dirty="0" spc="3" kern="0">
                 <a:solidFill>
                   <a:srgbClr val="14161C"/>
                 </a:solidFill>
@@ -10044,10 +10044,10 @@
                 <a:ea typeface="Be Vietnam Pro SemiBold" pitchFamily="34" charset="-122"/>
                 <a:cs typeface="Be Vietnam Pro SemiBold" pitchFamily="34" charset="-120"/>
               </a:rPr>
-              <a:t> nhóm nền</a:t>
-            </a:r>
-            <a:r>
-              <a:rPr lang="en-US" sz="2850" dirty="0" spc="-7" kern="0">
+              <a:t> riêng,</a:t>
+            </a:r>
+            <a:r>
+              <a:rPr lang="en-US" sz="2850" dirty="0" spc="-39" kern="0">
                 <a:solidFill>
                   <a:srgbClr val="14161C"/>
                 </a:solidFill>
@@ -10055,10 +10055,10 @@
                 <a:ea typeface="Be Vietnam Pro SemiBold" pitchFamily="34" charset="-122"/>
                 <a:cs typeface="Be Vietnam Pro SemiBold" pitchFamily="34" charset="-120"/>
               </a:rPr>
-              <a:t> tảng</a:t>
-            </a:r>
-            <a:r>
-              <a:rPr lang="en-US" sz="2850" dirty="0" spc="-12" kern="0">
+              <a:t> SLO</a:t>
+            </a:r>
+            <a:r>
+              <a:rPr lang="en-US" sz="2850" dirty="0" spc="0" kern="0">
                 <a:solidFill>
                   <a:srgbClr val="14161C"/>
                 </a:solidFill>
@@ -10066,10 +10066,10 @@
                 <a:ea typeface="Be Vietnam Pro SemiBold" pitchFamily="34" charset="-122"/>
                 <a:cs typeface="Be Vietnam Pro SemiBold" pitchFamily="34" charset="-120"/>
               </a:rPr>
-              <a:t> hay</a:t>
-            </a:r>
-            <a:r>
-              <a:rPr lang="en-US" sz="2850" dirty="0" spc="-32" kern="0">
+              <a:t> chính</a:t>
+            </a:r>
+            <a:r>
+              <a:rPr lang="en-US" sz="2850" dirty="0" spc="10" kern="0">
                 <a:solidFill>
                   <a:srgbClr val="14161C"/>
                 </a:solidFill>
@@ -10077,7 +10077,7 @@
                 <a:ea typeface="Be Vietnam Pro SemiBold" pitchFamily="34" charset="-122"/>
                 <a:cs typeface="Be Vietnam Pro SemiBold" pitchFamily="34" charset="-120"/>
               </a:rPr>
-              <a:t> SLO.</a:t>
+              <a:t> thức.</a:t>
             </a:r>
             <a:endParaRPr lang="en-US" sz="2850" dirty="0"/>
           </a:p>
@@ -10301,7 +10301,7 @@
               <a:t> cụ</a:t>
             </a:r>
             <a:r>
-              <a:rPr lang="en-US" sz="2850" dirty="0" spc="-1" kern="0">
+              <a:rPr lang="en-US" sz="2850" dirty="0" spc="-2" kern="0">
                 <a:solidFill>
                   <a:srgbClr val="14161C"/>
                 </a:solidFill>
@@ -10309,10 +10309,10 @@
                 <a:ea typeface="Be Vietnam Pro SemiBold" pitchFamily="34" charset="-122"/>
                 <a:cs typeface="Be Vietnam Pro SemiBold" pitchFamily="34" charset="-120"/>
               </a:rPr>
-              <a:t> thể</a:t>
-            </a:r>
-            <a:r>
-              <a:rPr lang="en-US" sz="2850" dirty="0" spc="-10" kern="0">
+              <a:t> thể,</a:t>
+            </a:r>
+            <a:r>
+              <a:rPr lang="en-US" sz="2850" dirty="0" spc="27" kern="0">
                 <a:solidFill>
                   <a:srgbClr val="14161C"/>
                 </a:solidFill>
@@ -10320,10 +10320,10 @@
                 <a:ea typeface="Be Vietnam Pro SemiBold" pitchFamily="34" charset="-122"/>
                 <a:cs typeface="Be Vietnam Pro SemiBold" pitchFamily="34" charset="-120"/>
               </a:rPr>
-              <a:t> thay</a:t>
-            </a:r>
-            <a:r>
-              <a:rPr lang="en-US" sz="2850" dirty="0" spc="2" kern="0">
+              <a:t> đừng</a:t>
+            </a:r>
+            <a:r>
+              <a:rPr lang="en-US" sz="2850" dirty="0" spc="15" kern="0">
                 <a:solidFill>
                   <a:srgbClr val="14161C"/>
                 </a:solidFill>
@@ -10331,10 +10331,10 @@
                 <a:ea typeface="Be Vietnam Pro SemiBold" pitchFamily="34" charset="-122"/>
                 <a:cs typeface="Be Vietnam Pro SemiBold" pitchFamily="34" charset="-120"/>
               </a:rPr>
-              <a:t> vì</a:t>
-            </a:r>
-            <a:r>
-              <a:rPr lang="en-US" sz="2850" dirty="0" spc="14" kern="0">
+              <a:t> dựa</a:t>
+            </a:r>
+            <a:r>
+              <a:rPr lang="en-US" sz="2850" dirty="0" spc="-12" kern="0">
                 <a:solidFill>
                   <a:srgbClr val="14161C"/>
                 </a:solidFill>
@@ -10342,21 +10342,10 @@
                 <a:ea typeface="Be Vietnam Pro SemiBold" pitchFamily="34" charset="-122"/>
                 <a:cs typeface="Be Vietnam Pro SemiBold" pitchFamily="34" charset="-120"/>
               </a:rPr>
-              <a:t> dựa</a:t>
-            </a:r>
-            <a:r>
-              <a:rPr lang="en-US" sz="2850" dirty="0" spc="-12" kern="0">
-                <a:solidFill>
-                  <a:srgbClr val="14161C"/>
-                </a:solidFill>
-                <a:latin typeface="Be Vietnam Pro SemiBold" pitchFamily="34" charset="0"/>
-                <a:ea typeface="Be Vietnam Pro SemiBold" pitchFamily="34" charset="-122"/>
-                <a:cs typeface="Be Vietnam Pro SemiBold" pitchFamily="34" charset="-120"/>
-              </a:rPr>
               <a:t> vào</a:t>
             </a:r>
             <a:r>
-              <a:rPr lang="en-US" sz="2850" dirty="0" spc="-9" kern="0">
+              <a:rPr lang="en-US" sz="2850" dirty="0" spc="-10" kern="0">
                 <a:solidFill>
                   <a:srgbClr val="14161C"/>
                 </a:solidFill>

--- a/system-design-101/vi/lessons/sd-13-019/slides/sd-13-019.pptx
+++ b/system-design-101/vi/lessons/sd-13-019/slides/sd-13-019.pptx
@@ -4669,17 +4669,6 @@
               <a:t> việc</a:t>
             </a:r>
             <a:r>
-              <a:rPr lang="en-US" sz="3000" dirty="0" spc="-13" kern="0">
-                <a:solidFill>
-                  <a:srgbClr val="E8472B"/>
-                </a:solidFill>
-                <a:latin typeface="Be Vietnam Pro ExtraBold" pitchFamily="34" charset="0"/>
-                <a:ea typeface="Be Vietnam Pro ExtraBold" pitchFamily="34" charset="-122"/>
-                <a:cs typeface="Be Vietnam Pro ExtraBold" pitchFamily="34" charset="-120"/>
-              </a:rPr>
-              <a:t> nên</a:t>
-            </a:r>
-            <a:r>
               <a:rPr lang="en-US" sz="3000" dirty="0" spc="1" kern="0">
                 <a:solidFill>
                   <a:srgbClr val="E8472B"/>
@@ -4738,7 +4727,18 @@
                 <a:ea typeface="Be Vietnam Pro" pitchFamily="34" charset="-122"/>
                 <a:cs typeface="Be Vietnam Pro" pitchFamily="34" charset="-120"/>
               </a:rPr>
-              <a:t>Nút</a:t>
+              <a:t>Nút chậm</a:t>
+            </a:r>
+            <a:r>
+              <a:rPr lang="en-US" sz="2550" dirty="0" spc="-10" kern="0">
+                <a:solidFill>
+                  <a:srgbClr val="14161C"/>
+                </a:solidFill>
+                <a:latin typeface="Be Vietnam Pro" pitchFamily="34" charset="0"/>
+                <a:ea typeface="Be Vietnam Pro" pitchFamily="34" charset="-122"/>
+                <a:cs typeface="Be Vietnam Pro" pitchFamily="34" charset="-120"/>
+              </a:rPr>
+              <a:t> nhất</a:t>
             </a:r>
             <a:r>
               <a:rPr lang="en-US" sz="2550" dirty="0" spc="0" kern="0">
@@ -4749,39 +4749,6 @@
                 <a:ea typeface="Be Vietnam Pro" pitchFamily="34" charset="-122"/>
                 <a:cs typeface="Be Vietnam Pro" pitchFamily="34" charset="-120"/>
               </a:rPr>
-              <a:t> nào</a:t>
-            </a:r>
-            <a:r>
-              <a:rPr lang="en-US" sz="2550" dirty="0" spc="1" kern="0">
-                <a:solidFill>
-                  <a:srgbClr val="14161C"/>
-                </a:solidFill>
-                <a:latin typeface="Be Vietnam Pro" pitchFamily="34" charset="0"/>
-                <a:ea typeface="Be Vietnam Pro" pitchFamily="34" charset="-122"/>
-                <a:cs typeface="Be Vietnam Pro" pitchFamily="34" charset="-120"/>
-              </a:rPr>
-              <a:t> chậm</a:t>
-            </a:r>
-            <a:r>
-              <a:rPr lang="en-US" sz="2550" dirty="0" spc="-10" kern="0">
-                <a:solidFill>
-                  <a:srgbClr val="14161C"/>
-                </a:solidFill>
-                <a:latin typeface="Be Vietnam Pro" pitchFamily="34" charset="0"/>
-                <a:ea typeface="Be Vietnam Pro" pitchFamily="34" charset="-122"/>
-                <a:cs typeface="Be Vietnam Pro" pitchFamily="34" charset="-120"/>
-              </a:rPr>
-              <a:t> nhất</a:t>
-            </a:r>
-            <a:r>
-              <a:rPr lang="en-US" sz="2550" dirty="0" spc="0" kern="0">
-                <a:solidFill>
-                  <a:srgbClr val="14161C"/>
-                </a:solidFill>
-                <a:latin typeface="Be Vietnam Pro" pitchFamily="34" charset="0"/>
-                <a:ea typeface="Be Vietnam Pro" pitchFamily="34" charset="-122"/>
-                <a:cs typeface="Be Vietnam Pro" pitchFamily="34" charset="-120"/>
-              </a:rPr>
               <a:t> ở</a:t>
             </a:r>
             <a:r>
@@ -4815,29 +4782,7 @@
                 <a:ea typeface="Be Vietnam Pro" pitchFamily="34" charset="-122"/>
                 <a:cs typeface="Be Vietnam Pro" pitchFamily="34" charset="-120"/>
               </a:rPr>
-              <a:t> của</a:t>
-            </a:r>
-            <a:r>
-              <a:rPr lang="en-US" sz="2550" dirty="0" spc="-3" kern="0">
-                <a:solidFill>
-                  <a:srgbClr val="14161C"/>
-                </a:solidFill>
-                <a:latin typeface="Be Vietnam Pro" pitchFamily="34" charset="0"/>
-                <a:ea typeface="Be Vietnam Pro" pitchFamily="34" charset="-122"/>
-                <a:cs typeface="Be Vietnam Pro" pitchFamily="34" charset="-120"/>
-              </a:rPr>
-              <a:t> bạn</a:t>
-            </a:r>
-            <a:r>
-              <a:rPr lang="en-US" sz="2550" dirty="0" spc="1" kern="0">
-                <a:solidFill>
-                  <a:srgbClr val="14161C"/>
-                </a:solidFill>
-                <a:latin typeface="Be Vietnam Pro" pitchFamily="34" charset="0"/>
-                <a:ea typeface="Be Vietnam Pro" pitchFamily="34" charset="-122"/>
-                <a:cs typeface="Be Vietnam Pro" pitchFamily="34" charset="-120"/>
-              </a:rPr>
-              <a:t> thì</a:t>
+              <a:t> bạn:</a:t>
             </a:r>
             <a:r>
               <a:rPr lang="en-US" sz="2550" dirty="0" spc="-2" kern="0">
@@ -4851,7 +4796,7 @@
               <a:t> xử</a:t>
             </a:r>
             <a:r>
-              <a:rPr lang="en-US" sz="2550" dirty="0" spc="0" kern="0">
+              <a:rPr lang="en-US" sz="2550" dirty="0" spc="-1" kern="0">
                 <a:solidFill>
                   <a:srgbClr val="14161C"/>
                 </a:solidFill>
@@ -11103,7 +11048,7 @@
               <a:t> hành</a:t>
             </a:r>
             <a:r>
-              <a:rPr lang="en-US" sz="3000" dirty="0" spc="-2" kern="0">
+              <a:rPr lang="en-US" sz="3000" dirty="0" spc="-1" kern="0">
                 <a:solidFill>
                   <a:srgbClr val="F3EEE3"/>
                 </a:solidFill>
@@ -11111,10 +11056,10 @@
                 <a:ea typeface="Be Vietnam Pro SemiBold" pitchFamily="34" charset="-122"/>
                 <a:cs typeface="Be Vietnam Pro SemiBold" pitchFamily="34" charset="-120"/>
               </a:rPr>
-              <a:t> tính</a:t>
-            </a:r>
-            <a:r>
-              <a:rPr lang="en-US" sz="3000" dirty="0" spc="-4" kern="0">
+              <a:t> tới</a:t>
+            </a:r>
+            <a:r>
+              <a:rPr lang="en-US" sz="3000" dirty="0" spc="2" kern="0">
                 <a:solidFill>
                   <a:srgbClr val="F3EEE3"/>
                 </a:solidFill>
@@ -11122,10 +11067,10 @@
                 <a:ea typeface="Be Vietnam Pro SemiBold" pitchFamily="34" charset="-122"/>
                 <a:cs typeface="Be Vietnam Pro SemiBold" pitchFamily="34" charset="-120"/>
               </a:rPr>
-              <a:t> năng</a:t>
-            </a:r>
-            <a:r>
-              <a:rPr lang="en-US" sz="3000" dirty="0" spc="3" kern="0">
+              <a:t> khi</a:t>
+            </a:r>
+            <a:r>
+              <a:rPr lang="en-US" sz="3000" dirty="0" spc="4" kern="0">
                 <a:solidFill>
                   <a:srgbClr val="F3EEE3"/>
                 </a:solidFill>
@@ -11133,10 +11078,10 @@
                 <a:ea typeface="Be Vietnam Pro SemiBold" pitchFamily="34" charset="-122"/>
                 <a:cs typeface="Be Vietnam Pro SemiBold" pitchFamily="34" charset="-120"/>
               </a:rPr>
-              <a:t> mới,</a:t>
-            </a:r>
-            <a:r>
-              <a:rPr lang="en-US" sz="3000" dirty="0" spc="-1" kern="0">
+              <a:t> đạt</a:t>
+            </a:r>
+            <a:r>
+              <a:rPr lang="en-US" sz="3000" dirty="0" spc="3" kern="0">
                 <a:solidFill>
                   <a:srgbClr val="F3EEE3"/>
                 </a:solidFill>
@@ -11144,40 +11089,7 @@
                 <a:ea typeface="Be Vietnam Pro SemiBold" pitchFamily="34" charset="-122"/>
                 <a:cs typeface="Be Vietnam Pro SemiBold" pitchFamily="34" charset="-120"/>
               </a:rPr>
-              <a:t> tới</a:t>
-            </a:r>
-            <a:r>
-              <a:rPr lang="en-US" sz="3000" dirty="0" spc="2" kern="0">
-                <a:solidFill>
-                  <a:srgbClr val="F3EEE3"/>
-                </a:solidFill>
-                <a:latin typeface="Be Vietnam Pro SemiBold" pitchFamily="34" charset="0"/>
-                <a:ea typeface="Be Vietnam Pro SemiBold" pitchFamily="34" charset="-122"/>
-                <a:cs typeface="Be Vietnam Pro SemiBold" pitchFamily="34" charset="-120"/>
-              </a:rPr>
-              <a:t> khi</a:t>
-            </a:r>
-            <a:r>
-              <a:rPr lang="en-US" sz="3000" dirty="0" spc="3" kern="0">
-                <a:solidFill>
-                  <a:srgbClr val="F3EEE3"/>
-                </a:solidFill>
-                <a:latin typeface="Be Vietnam Pro SemiBold" pitchFamily="34" charset="0"/>
-                <a:ea typeface="Be Vietnam Pro SemiBold" pitchFamily="34" charset="-122"/>
-                <a:cs typeface="Be Vietnam Pro SemiBold" pitchFamily="34" charset="-120"/>
-              </a:rPr>
               <a:t> lại</a:t>
-            </a:r>
-            <a:r>
-              <a:rPr lang="en-US" sz="3000" dirty="0" spc="4" kern="0">
-                <a:solidFill>
-                  <a:srgbClr val="F3EEE3"/>
-                </a:solidFill>
-                <a:latin typeface="Be Vietnam Pro SemiBold" pitchFamily="34" charset="0"/>
-                <a:ea typeface="Be Vietnam Pro SemiBold" pitchFamily="34" charset="-122"/>
-                <a:cs typeface="Be Vietnam Pro SemiBold" pitchFamily="34" charset="-120"/>
-              </a:rPr>
-              <a:t> đạt</a:t>
             </a:r>
             <a:r>
               <a:rPr lang="en-US" sz="3000" dirty="0" spc="-33" kern="0">
@@ -11294,17 +11206,6 @@
                 <a:cs typeface="Be Vietnam Pro" pitchFamily="34" charset="-120"/>
               </a:rPr>
               <a:t> đặt</a:t>
-            </a:r>
-            <a:r>
-              <a:rPr lang="en-US" sz="3000" dirty="0" spc="-38" kern="0">
-                <a:solidFill>
-                  <a:srgbClr val="E4E1D8"/>
-                </a:solidFill>
-                <a:latin typeface="Be Vietnam Pro" pitchFamily="34" charset="0"/>
-                <a:ea typeface="Be Vietnam Pro" pitchFamily="34" charset="-122"/>
-                <a:cs typeface="Be Vietnam Pro" pitchFamily="34" charset="-120"/>
-              </a:rPr>
-              <a:t> ra</a:t>
             </a:r>
             <a:r>
               <a:rPr lang="en-US" sz="3000" dirty="0" spc="1" kern="0">
@@ -12822,15 +12723,59 @@
               <a:t> lỗi:</a:t>
             </a:r>
             <a:r>
-              <a:rPr lang="en-US" sz="2400" dirty="0" spc="2" kern="0">
-                <a:solidFill>
-                  <a:srgbClr val="14161C"/>
-                </a:solidFill>
-                <a:latin typeface="Be Vietnam Pro" pitchFamily="34" charset="0"/>
-                <a:ea typeface="Be Vietnam Pro" pitchFamily="34" charset="-122"/>
-                <a:cs typeface="Be Vietnam Pro" pitchFamily="34" charset="-120"/>
-              </a:rPr>
-              <a:t> phần</a:t>
+              <a:rPr lang="en-US" sz="2400" dirty="0" spc="12" kern="0">
+                <a:solidFill>
+                  <a:srgbClr val="14161C"/>
+                </a:solidFill>
+                <a:latin typeface="Be Vietnam Pro" pitchFamily="34" charset="0"/>
+                <a:ea typeface="Be Vietnam Pro" pitchFamily="34" charset="-122"/>
+                <a:cs typeface="Be Vietnam Pro" pitchFamily="34" charset="-120"/>
+              </a:rPr>
+              <a:t> mức</a:t>
+            </a:r>
+            <a:r>
+              <a:rPr lang="en-US" sz="2400" dirty="0" spc="-3" kern="0">
+                <a:solidFill>
+                  <a:srgbClr val="14161C"/>
+                </a:solidFill>
+                <a:latin typeface="Be Vietnam Pro" pitchFamily="34" charset="0"/>
+                <a:ea typeface="Be Vietnam Pro" pitchFamily="34" charset="-122"/>
+                <a:cs typeface="Be Vietnam Pro" pitchFamily="34" charset="-120"/>
+              </a:rPr>
+              <a:t> lệch</a:t>
+            </a:r>
+            <a:r>
+              <a:rPr lang="en-US" sz="2400" dirty="0" spc="0" kern="0">
+                <a:solidFill>
+                  <a:srgbClr val="14161C"/>
+                </a:solidFill>
+                <a:latin typeface="Be Vietnam Pro" pitchFamily="34" charset="0"/>
+                <a:ea typeface="Be Vietnam Pro" pitchFamily="34" charset="-122"/>
+                <a:cs typeface="Be Vietnam Pro" pitchFamily="34" charset="-120"/>
+              </a:rPr>
+              <a:t> còn</a:t>
+            </a:r>
+            <a:r>
+              <a:rPr lang="en-US" sz="2400" dirty="0" spc="6" kern="0">
+                <a:solidFill>
+                  <a:srgbClr val="14161C"/>
+                </a:solidFill>
+                <a:latin typeface="Be Vietnam Pro" pitchFamily="34" charset="0"/>
+                <a:ea typeface="Be Vietnam Pro" pitchFamily="34" charset="-122"/>
+                <a:cs typeface="Be Vietnam Pro" pitchFamily="34" charset="-120"/>
+              </a:rPr>
+              <a:t> được</a:t>
+            </a:r>
+            <a:r>
+              <a:rPr lang="en-US" sz="2400" dirty="0" spc="1" kern="0">
+                <a:solidFill>
+                  <a:srgbClr val="14161C"/>
+                </a:solidFill>
+                <a:latin typeface="Be Vietnam Pro" pitchFamily="34" charset="0"/>
+                <a:ea typeface="Be Vietnam Pro" pitchFamily="34" charset="-122"/>
+                <a:cs typeface="Be Vietnam Pro" pitchFamily="34" charset="-120"/>
+              </a:rPr>
+              <a:t> phép</a:t>
             </a:r>
             <a:r>
               <a:rPr lang="en-US" sz="2400" dirty="0" spc="-7" kern="0">
@@ -12841,73 +12786,7 @@
                 <a:ea typeface="Be Vietnam Pro" pitchFamily="34" charset="-122"/>
                 <a:cs typeface="Be Vietnam Pro" pitchFamily="34" charset="-120"/>
               </a:rPr>
-              <a:t> sai</a:t>
-            </a:r>
-            <a:r>
-              <a:rPr lang="en-US" sz="2400" dirty="0" spc="-3" kern="0">
-                <a:solidFill>
-                  <a:srgbClr val="14161C"/>
-                </a:solidFill>
-                <a:latin typeface="Be Vietnam Pro" pitchFamily="34" charset="0"/>
-                <a:ea typeface="Be Vietnam Pro" pitchFamily="34" charset="-122"/>
-                <a:cs typeface="Be Vietnam Pro" pitchFamily="34" charset="-120"/>
-              </a:rPr>
-              <a:t> lệch</a:t>
-            </a:r>
-            <a:r>
-              <a:rPr lang="en-US" sz="2400" dirty="0" spc="0" kern="0">
-                <a:solidFill>
-                  <a:srgbClr val="14161C"/>
-                </a:solidFill>
-                <a:latin typeface="Be Vietnam Pro" pitchFamily="34" charset="0"/>
-                <a:ea typeface="Be Vietnam Pro" pitchFamily="34" charset="-122"/>
-                <a:cs typeface="Be Vietnam Pro" pitchFamily="34" charset="-120"/>
-              </a:rPr>
-              <a:t> còn</a:t>
-            </a:r>
-            <a:r>
-              <a:rPr lang="en-US" sz="2400" dirty="0" spc="6" kern="0">
-                <a:solidFill>
-                  <a:srgbClr val="14161C"/>
-                </a:solidFill>
-                <a:latin typeface="Be Vietnam Pro" pitchFamily="34" charset="0"/>
-                <a:ea typeface="Be Vietnam Pro" pitchFamily="34" charset="-122"/>
-                <a:cs typeface="Be Vietnam Pro" pitchFamily="34" charset="-120"/>
-              </a:rPr>
-              <a:t> được</a:t>
-            </a:r>
-            <a:r>
-              <a:rPr lang="en-US" sz="2400" dirty="0" spc="1" kern="0">
-                <a:solidFill>
-                  <a:srgbClr val="14161C"/>
-                </a:solidFill>
-                <a:latin typeface="Be Vietnam Pro" pitchFamily="34" charset="0"/>
-                <a:ea typeface="Be Vietnam Pro" pitchFamily="34" charset="-122"/>
-                <a:cs typeface="Be Vietnam Pro" pitchFamily="34" charset="-120"/>
-              </a:rPr>
-              <a:t> phép</a:t>
-            </a:r>
-            <a:r>
-              <a:rPr lang="en-US" sz="2400" dirty="0" spc="-7" kern="0">
-                <a:solidFill>
-                  <a:srgbClr val="14161C"/>
-                </a:solidFill>
-                <a:latin typeface="Be Vietnam Pro" pitchFamily="34" charset="0"/>
-                <a:ea typeface="Be Vietnam Pro" pitchFamily="34" charset="-122"/>
-                <a:cs typeface="Be Vietnam Pro" pitchFamily="34" charset="-120"/>
-              </a:rPr>
               <a:t> so</a:t>
-            </a:r>
-            <a:r>
-              <a:rPr lang="en-US" sz="2400" dirty="0" spc="-13" kern="0">
-                <a:solidFill>
-                  <a:srgbClr val="14161C"/>
-                </a:solidFill>
-                <a:latin typeface="Be Vietnam Pro" pitchFamily="34" charset="0"/>
-                <a:ea typeface="Be Vietnam Pro" pitchFamily="34" charset="-122"/>
-                <a:cs typeface="Be Vietnam Pro" pitchFamily="34" charset="-120"/>
-              </a:rPr>
-              <a:t> với</a:t>
             </a:r>
             <a:r>
               <a:rPr lang="en-US" sz="2400" dirty="0" spc="-35" kern="0">
@@ -13076,17 +12955,6 @@
               <a:t> giá</a:t>
             </a:r>
             <a:r>
-              <a:rPr lang="en-US" sz="2400" dirty="0" spc="-7" kern="0">
-                <a:solidFill>
-                  <a:srgbClr val="14161C"/>
-                </a:solidFill>
-                <a:latin typeface="Be Vietnam Pro" pitchFamily="34" charset="0"/>
-                <a:ea typeface="Be Vietnam Pro" pitchFamily="34" charset="-122"/>
-                <a:cs typeface="Be Vietnam Pro" pitchFamily="34" charset="-120"/>
-              </a:rPr>
-              <a:t> sau</a:t>
-            </a:r>
-            <a:r>
               <a:rPr lang="en-US" sz="2400" dirty="0" spc="1" kern="0">
                 <a:solidFill>
                   <a:srgbClr val="14161C"/>
@@ -13095,7 +12963,7 @@
                 <a:ea typeface="Be Vietnam Pro" pitchFamily="34" charset="-122"/>
                 <a:cs typeface="Be Vietnam Pro" pitchFamily="34" charset="-120"/>
               </a:rPr>
-              <a:t> sự</a:t>
+              <a:t> sự cố,</a:t>
             </a:r>
             <a:r>
               <a:rPr lang="en-US" sz="2400" dirty="0" spc="0" kern="0">
@@ -13106,29 +12974,7 @@
                 <a:ea typeface="Be Vietnam Pro" pitchFamily="34" charset="-122"/>
                 <a:cs typeface="Be Vietnam Pro" pitchFamily="34" charset="-120"/>
               </a:rPr>
-              <a:t> cố,</a:t>
-            </a:r>
-            <a:r>
-              <a:rPr lang="en-US" sz="2400" dirty="0" spc="1" kern="0">
-                <a:solidFill>
-                  <a:srgbClr val="14161C"/>
-                </a:solidFill>
-                <a:latin typeface="Be Vietnam Pro" pitchFamily="34" charset="0"/>
-                <a:ea typeface="Be Vietnam Pro" pitchFamily="34" charset="-122"/>
-                <a:cs typeface="Be Vietnam Pro" pitchFamily="34" charset="-120"/>
-              </a:rPr>
-              <a:t> không</a:t>
-            </a:r>
-            <a:r>
-              <a:rPr lang="en-US" sz="2400" dirty="0" spc="0" kern="0">
-                <a:solidFill>
-                  <a:srgbClr val="14161C"/>
-                </a:solidFill>
-                <a:latin typeface="Be Vietnam Pro" pitchFamily="34" charset="0"/>
-                <a:ea typeface="Be Vietnam Pro" pitchFamily="34" charset="-122"/>
-                <a:cs typeface="Be Vietnam Pro" pitchFamily="34" charset="-120"/>
-              </a:rPr>
-              <a:t> quy lỗi.</a:t>
+              <a:t> không quy lỗi.</a:t>
             </a:r>
             <a:endParaRPr lang="en-US" sz="2400" dirty="0"/>
           </a:p>

--- a/system-design-101/vi/lessons/sd-13-019/slides/sd-13-019.pptx
+++ b/system-design-101/vi/lessons/sd-13-019/slides/sd-13-019.pptx
@@ -1977,7 +1977,7 @@
               <a:t> gian</a:t>
             </a:r>
             <a:r>
-              <a:rPr lang="en-US" sz="3000" dirty="0" spc="-15" kern="0">
+              <a:rPr lang="en-US" sz="3000" dirty="0" spc="7" kern="0">
                 <a:solidFill>
                   <a:srgbClr val="E4E1D8"/>
                 </a:solidFill>
@@ -1985,54 +1985,65 @@
                 <a:ea typeface="Be Vietnam Pro" pitchFamily="34" charset="-122"/>
                 <a:cs typeface="Be Vietnam Pro" pitchFamily="34" charset="-120"/>
               </a:rPr>
+              <a:t> thường</a:t>
+            </a:r>
+            <a:r>
+              <a:rPr lang="en-US" sz="3000" dirty="0" spc="-14" kern="0">
+                <a:solidFill>
+                  <a:srgbClr val="E4E1D8"/>
+                </a:solidFill>
+                <a:latin typeface="Be Vietnam Pro" pitchFamily="34" charset="0"/>
+                <a:ea typeface="Be Vietnam Pro" pitchFamily="34" charset="-122"/>
+                <a:cs typeface="Be Vietnam Pro" pitchFamily="34" charset="-120"/>
+              </a:rPr>
               <a:t> mất</a:t>
             </a:r>
             <a:r>
+              <a:rPr lang="en-US" sz="3000" dirty="0" spc="4" kern="0">
+                <a:solidFill>
+                  <a:srgbClr val="E4E1D8"/>
+                </a:solidFill>
+                <a:latin typeface="Be Vietnam Pro" pitchFamily="34" charset="0"/>
+                <a:ea typeface="Be Vietnam Pro" pitchFamily="34" charset="-122"/>
+                <a:cs typeface="Be Vietnam Pro" pitchFamily="34" charset="-120"/>
+              </a:rPr>
+              <a:t> ở</a:t>
+            </a:r>
+            <a:r>
+              <a:rPr lang="en-US" sz="3000" dirty="0" spc="-16" kern="0">
+                <a:solidFill>
+                  <a:srgbClr val="E4E1D8"/>
+                </a:solidFill>
+                <a:latin typeface="Be Vietnam Pro" pitchFamily="34" charset="0"/>
+                <a:ea typeface="Be Vietnam Pro" pitchFamily="34" charset="-122"/>
+                <a:cs typeface="Be Vietnam Pro" pitchFamily="34" charset="-120"/>
+              </a:rPr>
+              <a:t> chuyển</a:t>
+            </a:r>
+            <a:r>
+              <a:rPr lang="en-US" sz="3000" dirty="0" spc="2" kern="0">
+                <a:solidFill>
+                  <a:srgbClr val="E4E1D8"/>
+                </a:solidFill>
+                <a:latin typeface="Be Vietnam Pro" pitchFamily="34" charset="0"/>
+                <a:ea typeface="Be Vietnam Pro" pitchFamily="34" charset="-122"/>
+                <a:cs typeface="Be Vietnam Pro" pitchFamily="34" charset="-120"/>
+              </a:rPr>
+              <a:t> giao,</a:t>
+            </a:r>
+            <a:r>
+              <a:rPr lang="en-US" sz="3000" dirty="0" spc="1" kern="0">
+                <a:solidFill>
+                  <a:srgbClr val="E4E1D8"/>
+                </a:solidFill>
+                <a:latin typeface="Be Vietnam Pro" pitchFamily="34" charset="0"/>
+                <a:ea typeface="Be Vietnam Pro" pitchFamily="34" charset="-122"/>
+                <a:cs typeface="Be Vietnam Pro" pitchFamily="34" charset="-120"/>
+              </a:rPr>
+              <a:t> không</a:t>
+            </a:r>
+            <a:r>
               <a:rPr lang="en-US" sz="3000" dirty="0" spc="5" kern="0">
-                <a:solidFill>
-                  <a:srgbClr val="E4E1D8"/>
-                </a:solidFill>
-                <a:latin typeface="Be Vietnam Pro" pitchFamily="34" charset="0"/>
-                <a:ea typeface="Be Vietnam Pro" pitchFamily="34" charset="-122"/>
-                <a:cs typeface="Be Vietnam Pro" pitchFamily="34" charset="-120"/>
-              </a:rPr>
-              <a:t> ở</a:t>
-            </a:r>
-            <a:r>
-              <a:rPr lang="en-US" sz="3000" dirty="0" spc="2" kern="0">
-                <a:solidFill>
-                  <a:srgbClr val="E4E1D8"/>
-                </a:solidFill>
-                <a:latin typeface="Be Vietnam Pro" pitchFamily="34" charset="0"/>
-                <a:ea typeface="Be Vietnam Pro" pitchFamily="34" charset="-122"/>
-                <a:cs typeface="Be Vietnam Pro" pitchFamily="34" charset="-120"/>
-              </a:rPr>
-              <a:t> chỗ</a:t>
-            </a:r>
-            <a:r>
-              <a:rPr lang="en-US" sz="3000" dirty="0" spc="-15" kern="0">
-                <a:solidFill>
-                  <a:srgbClr val="E4E1D8"/>
-                </a:solidFill>
-                <a:latin typeface="Be Vietnam Pro" pitchFamily="34" charset="0"/>
-                <a:ea typeface="Be Vietnam Pro" pitchFamily="34" charset="-122"/>
-                <a:cs typeface="Be Vietnam Pro" pitchFamily="34" charset="-120"/>
-              </a:rPr>
-              <a:t> chuyển</a:t>
-            </a:r>
-            <a:r>
-              <a:rPr lang="en-US" sz="3000" dirty="0" spc="1" kern="0">
-                <a:solidFill>
-                  <a:srgbClr val="E4E1D8"/>
-                </a:solidFill>
-                <a:latin typeface="Be Vietnam Pro" pitchFamily="34" charset="0"/>
-                <a:ea typeface="Be Vietnam Pro" pitchFamily="34" charset="-122"/>
-                <a:cs typeface="Be Vietnam Pro" pitchFamily="34" charset="-120"/>
-              </a:rPr>
-              <a:t> giao, không</a:t>
-            </a:r>
-            <a:r>
-              <a:rPr lang="en-US" sz="3000" dirty="0" spc="6" kern="0">
                 <a:solidFill>
                   <a:srgbClr val="E4E1D8"/>
                 </a:solidFill>

--- a/system-design-101/vi/lessons/sd-13-019/slides/sd-13-019.pptx
+++ b/system-design-101/vi/lessons/sd-13-019/slides/sd-13-019.pptx
@@ -4254,7 +4254,7 @@
               <a:t> gian</a:t>
             </a:r>
             <a:r>
-              <a:rPr lang="en-US" sz="6900" dirty="0" spc="-1" kern="0">
+              <a:rPr lang="en-US" sz="6900" dirty="0" spc="-61" kern="0">
                 <a:solidFill>
                   <a:srgbClr val="14161C"/>
                 </a:solidFill>
@@ -4262,10 +4262,10 @@
                 <a:ea typeface="Bricolage Grotesque ExtraBold" pitchFamily="34" charset="-122"/>
                 <a:cs typeface="Bricolage Grotesque ExtraBold" pitchFamily="34" charset="-120"/>
               </a:rPr>
-              <a:t> mất</a:t>
-            </a:r>
-            <a:r>
-              <a:rPr lang="en-US" sz="6900" dirty="0" spc="1" kern="0">
+              <a:t> thường</a:t>
+            </a:r>
+            <a:r>
+              <a:rPr lang="en-US" sz="6900" dirty="0" spc="-2" kern="0">
                 <a:solidFill>
                   <a:srgbClr val="14161C"/>
                 </a:solidFill>
@@ -4273,10 +4273,10 @@
                 <a:ea typeface="Bricolage Grotesque ExtraBold" pitchFamily="34" charset="-122"/>
                 <a:cs typeface="Bricolage Grotesque ExtraBold" pitchFamily="34" charset="-120"/>
               </a:rPr>
-              <a:t> ở</a:t>
-            </a:r>
-            <a:r>
-              <a:rPr lang="en-US" sz="6900" dirty="0" spc="-1" kern="0">
+              <a:t> mất</a:t>
+            </a:r>
+            <a:r>
+              <a:rPr lang="en-US" sz="6900" dirty="0" spc="0" kern="0">
                 <a:solidFill>
                   <a:srgbClr val="14161C"/>
                 </a:solidFill>
@@ -4284,7 +4284,7 @@
                 <a:ea typeface="Bricolage Grotesque ExtraBold" pitchFamily="34" charset="-122"/>
                 <a:cs typeface="Bricolage Grotesque ExtraBold" pitchFamily="34" charset="-120"/>
               </a:rPr>
-              <a:t> chỗ</a:t>
+              <a:t> ở</a:t>
             </a:r>
             <a:r>
               <a:rPr lang="en-US" sz="6900" dirty="0" spc="3" kern="0">
